--- a/apps/resources/bundled_files/6-klass-kvadrat-kub-daraja-sabak.pptx
+++ b/apps/resources/bundled_files/6-klass-kvadrat-kub-daraja-sabak.pptx
@@ -5196,7 +5196,7 @@
                 </a:solidFill>
                 <a:latin typeface="PT Sans"/>
               </a:rPr>
-              <a:t>6-класс · Математика</a:t>
+              <a:t/>
             </a:r>
           </a:p>
         </p:txBody>
@@ -5688,7 +5688,7 @@
                 </a:solidFill>
                 <a:latin typeface="PT Sans"/>
               </a:rPr>
-              <a:t>6-класс ›</a:t>
+              <a:t/>
             </a:r>
           </a:p>
           <a:p>
@@ -6621,7 +6621,7 @@
                 </a:solidFill>
                 <a:latin typeface="PT Sans"/>
               </a:rPr>
-              <a:t>6-класс ›</a:t>
+              <a:t/>
             </a:r>
           </a:p>
           <a:p>
@@ -10941,7 +10941,7 @@
                 </a:solidFill>
                 <a:latin typeface="PT Sans"/>
               </a:rPr>
-              <a:t>6-класс ›</a:t>
+              <a:t/>
             </a:r>
           </a:p>
           <a:p>
@@ -16106,7 +16106,7 @@
                 </a:solidFill>
                 <a:latin typeface="PT Sans"/>
               </a:rPr>
-              <a:t>6-класс ›</a:t>
+              <a:t/>
             </a:r>
           </a:p>
           <a:p>
@@ -17689,7 +17689,7 @@
                 </a:solidFill>
                 <a:latin typeface="PT Sans"/>
               </a:rPr>
-              <a:t>6-класс ›</a:t>
+              <a:t/>
             </a:r>
           </a:p>
           <a:p>
@@ -18479,7 +18479,7 @@
                 </a:solidFill>
                 <a:latin typeface="PT Sans"/>
               </a:rPr>
-              <a:t>6-класс ›</a:t>
+              <a:t/>
             </a:r>
           </a:p>
           <a:p>
@@ -19269,7 +19269,7 @@
                 </a:solidFill>
                 <a:latin typeface="PT Sans"/>
               </a:rPr>
-              <a:t>6-класс ›</a:t>
+              <a:t/>
             </a:r>
           </a:p>
           <a:p>
@@ -20935,7 +20935,7 @@
                 </a:solidFill>
                 <a:latin typeface="PT Sans"/>
               </a:rPr>
-              <a:t>6-класс ›</a:t>
+              <a:t/>
             </a:r>
           </a:p>
           <a:p>
@@ -22019,7 +22019,7 @@
                 </a:solidFill>
                 <a:latin typeface="PT Sans"/>
               </a:rPr>
-              <a:t>6-класс ›</a:t>
+              <a:t/>
             </a:r>
           </a:p>
           <a:p>
@@ -23549,7 +23549,7 @@
                 </a:solidFill>
                 <a:latin typeface="PT Sans"/>
               </a:rPr>
-              <a:t>6-класс ›</a:t>
+              <a:t/>
             </a:r>
           </a:p>
           <a:p>
@@ -25582,7 +25582,7 @@
                 </a:solidFill>
                 <a:latin typeface="PT Sans"/>
               </a:rPr>
-              <a:t>6-класс ›</a:t>
+              <a:t/>
             </a:r>
           </a:p>
           <a:p>
@@ -26859,7 +26859,7 @@
                 </a:solidFill>
                 <a:latin typeface="PT Sans"/>
               </a:rPr>
-              <a:t>6-класс ›</a:t>
+              <a:t/>
             </a:r>
           </a:p>
           <a:p>
@@ -28287,7 +28287,7 @@
                 </a:solidFill>
                 <a:latin typeface="PT Sans"/>
               </a:rPr>
-              <a:t>6-класс ›</a:t>
+              <a:t/>
             </a:r>
           </a:p>
           <a:p>
@@ -29743,7 +29743,7 @@
                 </a:solidFill>
                 <a:latin typeface="PT Sans"/>
               </a:rPr>
-              <a:t>6-класс ›</a:t>
+              <a:t/>
             </a:r>
           </a:p>
           <a:p>
@@ -30984,7 +30984,7 @@
                 </a:solidFill>
                 <a:latin typeface="PT Sans"/>
               </a:rPr>
-              <a:t>6-класс ›</a:t>
+              <a:t/>
             </a:r>
           </a:p>
           <a:p>
@@ -31784,7 +31784,7 @@
                 </a:solidFill>
                 <a:latin typeface="PT Sans"/>
               </a:rPr>
-              <a:t>6-класс ›</a:t>
+              <a:t/>
             </a:r>
           </a:p>
           <a:p>
@@ -32625,7 +32625,7 @@
                 </a:solidFill>
                 <a:latin typeface="PT Sans"/>
               </a:rPr>
-              <a:t>6-класс ›</a:t>
+              <a:t/>
             </a:r>
           </a:p>
           <a:p>
@@ -33574,7 +33574,7 @@
                 </a:solidFill>
                 <a:latin typeface="PT Sans"/>
               </a:rPr>
-              <a:t>6-класс ›</a:t>
+              <a:t/>
             </a:r>
           </a:p>
           <a:p>
@@ -35028,7 +35028,7 @@
                 </a:solidFill>
                 <a:latin typeface="PT Sans"/>
               </a:rPr>
-              <a:t>6-класс ›</a:t>
+              <a:t/>
             </a:r>
           </a:p>
           <a:p>
@@ -35774,7 +35774,7 @@
                 </a:solidFill>
                 <a:latin typeface="PT Sans"/>
               </a:rPr>
-              <a:t>6-класс ›</a:t>
+              <a:t/>
             </a:r>
           </a:p>
           <a:p>
@@ -36582,7 +36582,7 @@
                 </a:solidFill>
                 <a:latin typeface="PT Sans"/>
               </a:rPr>
-              <a:t>6-класс ›</a:t>
+              <a:t/>
             </a:r>
           </a:p>
           <a:p>
@@ -37773,7 +37773,7 @@
                 </a:solidFill>
                 <a:latin typeface="PT Sans"/>
               </a:rPr>
-              <a:t>6-класс ›</a:t>
+              <a:t/>
             </a:r>
           </a:p>
           <a:p>
@@ -38952,7 +38952,7 @@
                 </a:solidFill>
                 <a:latin typeface="PT Sans"/>
               </a:rPr>
-              <a:t>6-класс ›</a:t>
+              <a:t/>
             </a:r>
           </a:p>
           <a:p>
@@ -39133,7 +39133,7 @@
                 </a:solidFill>
                 <a:latin typeface="PT Sans"/>
               </a:rPr>
-              <a:t>4-класс</a:t>
+              <a:t/>
             </a:r>
           </a:p>
         </p:txBody>
@@ -39313,7 +39313,7 @@
                 </a:solidFill>
                 <a:latin typeface="PT Sans"/>
               </a:rPr>
-              <a:t>5-класс</a:t>
+              <a:t/>
             </a:r>
           </a:p>
         </p:txBody>
@@ -39493,7 +39493,7 @@
                 </a:solidFill>
                 <a:latin typeface="PT Sans"/>
               </a:rPr>
-              <a:t>6-класс</a:t>
+              <a:t/>
             </a:r>
           </a:p>
         </p:txBody>
@@ -39729,7 +39729,7 @@
                 </a:solidFill>
                 <a:latin typeface="PT Sans"/>
               </a:rPr>
-              <a:t>7-класс</a:t>
+              <a:t/>
             </a:r>
           </a:p>
         </p:txBody>
@@ -40149,7 +40149,7 @@
                 </a:solidFill>
                 <a:latin typeface="PT Sans"/>
               </a:rPr>
-              <a:t>6-класс ›</a:t>
+              <a:t/>
             </a:r>
           </a:p>
           <a:p>
@@ -41297,7 +41297,7 @@
                 </a:solidFill>
                 <a:latin typeface="PT Sans"/>
               </a:rPr>
-              <a:t>6-класс ›</a:t>
+              <a:t/>
             </a:r>
           </a:p>
           <a:p>

--- a/apps/resources/bundled_files/6-klass-kvadrat-kub-daraja-sabak.pptx
+++ b/apps/resources/bundled_files/6-klass-kvadrat-kub-daraja-sabak.pptx
@@ -1582,7 +1582,7 @@
           <a:lstStyle/>
           <a:p>
             <a:r>
-              <a:t>Ой жүгүртүү маданияты (Wenxi Lee, 2.6).</a:t>
+              <a:t>Ой жүгүртүү маданияты (Wenxi Lee, 2,6).</a:t>
             </a:r>
           </a:p>
         </p:txBody>
